--- a/workshop_using_the_inclusion_rules_scripts.pptx
+++ b/workshop_using_the_inclusion_rules_scripts.pptx
@@ -3981,7 +3981,7 @@
             </a:pPr>
             <a:r>
               <a:rPr sz="1300"/>
-              <a:t>- The x-axis is the precision floor. Move right: fewer, sharper flags; left: more coverage. Left panel = precision on a new year; right panel = share of error dollars caught.</a:t>
+              <a:t>- Each point = one precision floor (gray labels). Move left for fewer, sharper flags; right for more coverage. The dashed line counts only the intended error type - the solid line counts every error found (what reviewers experience).</a:t>
             </a:r>
           </a:p>
         </p:txBody>
@@ -3995,15 +3995,15 @@
           <p:nvPr/>
         </p:nvPicPr>
         <p:blipFill>
-          <a:blip r:embed="rId3"/>
+          <a:blip r:embed="rId4"/>
           <a:stretch>
             <a:fillRect/>
           </a:stretch>
         </p:blipFill>
         <p:spPr>
           <a:xfrm>
-            <a:off x="1929200" y="1890350"/>
-            <a:ext cx="5285600" cy="2642800"/>
+            <a:off x="1929200" y="1560000"/>
+            <a:ext cx="5285600" cy="3303500"/>
           </a:xfrm>
           <a:prstGeom prst="rect">
             <a:avLst/>

--- a/workshop_using_the_inclusion_rules_scripts.pptx
+++ b/workshop_using_the_inclusion_rules_scripts.pptx
@@ -3981,29 +3981,29 @@
             </a:pPr>
             <a:r>
               <a:rPr sz="1300"/>
-              <a:t>- Each point = one precision floor (gray labels). Move left for fewer, sharper flags; right for more coverage. The dashed line counts only the intended error type - the solid line counts every error found (what reviewers experience).</a:t>
+              <a:t>- The x-axis is the precision floor. Move right: fewer, sharper flags; left: more coverage. Left panel = precision on a new year; right panel = share of error dollars caught.</a:t>
             </a:r>
           </a:p>
         </p:txBody>
       </p:sp>
       <p:pic>
         <p:nvPicPr>
-          <p:cNvPr id="4" name="Picture 3" descr="any_error_lcb_sweep.png"/>
+          <p:cNvPr id="4" name="Picture 3" descr="image.png"/>
           <p:cNvPicPr>
             <a:picLocks noChangeAspect="1"/>
           </p:cNvPicPr>
           <p:nvPr/>
         </p:nvPicPr>
         <p:blipFill>
-          <a:blip r:embed="rId4"/>
+          <a:blip r:embed="rId3"/>
           <a:stretch>
             <a:fillRect/>
           </a:stretch>
         </p:blipFill>
         <p:spPr>
           <a:xfrm>
-            <a:off x="1929200" y="1560000"/>
-            <a:ext cx="5285600" cy="3303500"/>
+            <a:off x="1929200" y="1890350"/>
+            <a:ext cx="5285600" cy="2642800"/>
           </a:xfrm>
           <a:prstGeom prst="rect">
             <a:avLst/>

--- a/workshop_using_the_inclusion_rules_scripts.pptx
+++ b/workshop_using_the_inclusion_rules_scripts.pptx
@@ -3878,7 +3878,7 @@
             </a:pPr>
             <a:r>
               <a:rPr sz="1400"/>
-              <a:t>    - INCL_find_inclusion_rules_by_hh_size_v2.R - build a rule list from labeled data</a:t>
+              <a:t>    - INCL_find_inclusion_rules_by_hh_size_v2.R: build a rule list from labeled data</a:t>
             </a:r>
           </a:p>
           <a:p>
@@ -3889,7 +3889,7 @@
             </a:pPr>
             <a:r>
               <a:rPr sz="1400"/>
-              <a:t>    - state_threshold_gridsearch_v2.R - adjust the rules to your state and test them honestly</a:t>
+              <a:t>    - state_threshold_gridsearch_v2.R: adjust the rules to your state and test them honestly</a:t>
             </a:r>
           </a:p>
           <a:p>
@@ -3900,7 +3900,7 @@
             </a:pPr>
             <a:r>
               <a:rPr sz="1600"/>
-              <a:t>- github.com/giannella/snap_qc - everything today is in the public repo</a:t>
+              <a:t>- github.com/giannella/snap_qc: everything today is in the public repo</a:t>
             </a:r>
           </a:p>
         </p:txBody>
@@ -4121,7 +4121,7 @@
             </a:pPr>
             <a:r>
               <a:rPr sz="1500"/>
-              <a:t>- Open the shortlist CSV and sort by confident precision - what do the top rules have in common?</a:t>
+              <a:t>- Open the shortlist CSV and sort by confident precision: what do the top rules have in common?</a:t>
             </a:r>
           </a:p>
           <a:p>
@@ -4143,7 +4143,7 @@
             </a:pPr>
             <a:r>
               <a:rPr sz="1500"/>
-              <a:t>- Check it against the data live: run the rule's condition in R and look at the flagged cases - count how many were real errors</a:t>
+              <a:t>- Check it against the data live: run the rule's condition in R and look at the flagged cases; count how many were real errors</a:t>
             </a:r>
           </a:p>
           <a:p>
@@ -4235,7 +4235,7 @@
             </a:pPr>
             <a:r>
               <a:rPr sz="1500"/>
-              <a:t>- The shortlist is a MENU, not a mandate - your program experts should drop rules that don't make operational sense</a:t>
+              <a:t>- The shortlist is a MENU, not a mandate; your program experts should drop rules that don't make operational sense</a:t>
             </a:r>
           </a:p>
           <a:p>
@@ -4257,7 +4257,7 @@
             </a:pPr>
             <a:r>
               <a:rPr sz="1500"/>
-              <a:t>- Dropping a rule never breaks the others - each rule stands on its own</a:t>
+              <a:t>- Dropping a rule never breaks the others; each rule stands on its own</a:t>
             </a:r>
           </a:p>
           <a:p>
@@ -4268,7 +4268,7 @@
             </a:pPr>
             <a:r>
               <a:rPr sz="1500"/>
-              <a:t>- Rule of thumb from our testing: expect roughly the 'confident precision' number in practice - it was set with statistical caution so it holds up</a:t>
+              <a:t>- Rule of thumb from our testing: expect roughly the 'confident precision' number in practice; it was set with statistical caution so it holds up</a:t>
             </a:r>
           </a:p>
         </p:txBody>
@@ -4349,7 +4349,7 @@
             </a:pPr>
             <a:r>
               <a:rPr sz="1300"/>
-              <a:t>- Two ways of building the rule list perform identically on new data - but the approach we use keeps several times more rules above any precision floor. That surplus is your freedom to veto.</a:t>
+              <a:t>- Two ways of building the rule list perform identically on new data, but the approach we use keeps several times more rules above any precision floor. That surplus is your freedom to veto.</a:t>
             </a:r>
           </a:p>
         </p:txBody>
@@ -4609,7 +4609,7 @@
             </a:pPr>
             <a:r>
               <a:rPr sz="1500"/>
-              <a:t>- Every tuned rule is scored on the test year - which the tuning never touched - under BOTH its tuned cutoffs and the original national ones</a:t>
+              <a:t>- Every tuned rule is scored on the test year (which the tuning never touched) under BOTH its tuned cutoffs and the original national ones</a:t>
             </a:r>
           </a:p>
           <a:p>
@@ -4620,7 +4620,7 @@
             </a:pPr>
             <a:r>
               <a:rPr sz="1500"/>
-              <a:t>- The script also reports what you'd get by skipping tuning entirely and using the national rules unchanged - the fallback every state has</a:t>
+              <a:t>- The script also reports what you'd get by skipping tuning entirely and using the national rules unchanged: the fallback every state has</a:t>
             </a:r>
           </a:p>
           <a:p>
@@ -4758,7 +4758,7 @@
             </a:pPr>
             <a:r>
               <a:rPr sz="1500"/>
-              <a:t>- Someone name a state - we'll change one line and run the whole thing now (takes about two minutes)</a:t>
+              <a:t>- Someone name a state, and we'll change one line and run the whole thing now (takes about two minutes)</a:t>
             </a:r>
           </a:p>
           <a:p>
@@ -4791,7 +4791,7 @@
             </a:pPr>
             <a:r>
               <a:rPr sz="1500"/>
-              <a:t>- If few rules qualified - that IS the answer: this state should use the national rules unchanged</a:t>
+              <a:t>- If few rules qualified, that IS the answer: this state should use the national rules unchanged</a:t>
             </a:r>
           </a:p>
         </p:txBody>
@@ -4905,7 +4905,7 @@
             </a:pPr>
             <a:r>
               <a:rPr sz="1500"/>
-              <a:t>- Whatever you choose, keep the unused rules - they're your replacements when experts veto something</a:t>
+              <a:t>- Whatever you choose, keep the unused rules; they're your replacements when experts veto something</a:t>
             </a:r>
           </a:p>
         </p:txBody>
@@ -5021,7 +5021,7 @@
             </a:pPr>
             <a:r>
               <a:rPr sz="1500"/>
-              <a:t>- At the start of the session we launched a small version of the finder (one error category, reduced settings) - let's read what it found</a:t>
+              <a:t>- At the start of the session we launched a small version of the finder (one error category, reduced settings). Let's read what it found</a:t>
             </a:r>
           </a:p>
           <a:p>
@@ -5054,7 +5054,7 @@
             </a:pPr>
             <a:r>
               <a:rPr sz="1500"/>
-              <a:t>- Full-strength national runs use bigger settings and take a couple of hours - same pipeline, just smaller today</a:t>
+              <a:t>- Full-strength national runs use bigger settings and take a couple of hours; same pipeline, just smaller today</a:t>
             </a:r>
           </a:p>
         </p:txBody>
@@ -5146,7 +5146,7 @@
             </a:pPr>
             <a:r>
               <a:rPr sz="1500"/>
-              <a:t>- Predictors must be numbers or yes/no - recode categories first (the script tells you which columns it can't use)</a:t>
+              <a:t>- Predictors must be numbers or yes/no; recode categories first (the script tells you which columns it can't use)</a:t>
             </a:r>
           </a:p>
           <a:p>
@@ -5168,7 +5168,7 @@
             </a:pPr>
             <a:r>
               <a:rPr sz="1500"/>
-              <a:t>- Internal data is usually richer than the public QC files - wage records, churn history, notice dates all make good predictors</a:t>
+              <a:t>- Internal data is usually richer than the public QC files: wage records, churn history, notice dates all make good predictors</a:t>
             </a:r>
           </a:p>
           <a:p>
@@ -5260,7 +5260,7 @@
             </a:pPr>
             <a:r>
               <a:rPr sz="1500"/>
-              <a:t>- Rules mined from NATIONAL public QC data - far more error cases to learn from than any single state has, so the patterns are better established</a:t>
+              <a:t>- Rules mined from NATIONAL public QC data: far more error cases to learn from than any single state has, so the patterns are better established</a:t>
             </a:r>
           </a:p>
           <a:p>
@@ -5282,7 +5282,7 @@
             </a:pPr>
             <a:r>
               <a:rPr sz="1500"/>
-              <a:t>- Completely open source and free (Apache 2.0) - the code, the mined rules, the validation results, and these slides</a:t>
+              <a:t>- Completely open source and free (Apache 2.0): the code, the mined rules, the validation results, and these slides</a:t>
             </a:r>
           </a:p>
           <a:p>
@@ -5385,7 +5385,7 @@
             </a:pPr>
             <a:r>
               <a:rPr sz="1500"/>
-              <a:t>- Trusting raw accuracy: a rule list promising 20% delivered 10% on new data. Always use the evidence-adjusted score - the scripts do this by default.</a:t>
+              <a:t>- Trusting raw accuracy: a rule list promising 20% delivered 10% on new data. Always use the evidence-adjusted score; the scripts do this by default.</a:t>
             </a:r>
           </a:p>
           <a:p>
@@ -5396,7 +5396,7 @@
             </a:pPr>
             <a:r>
               <a:rPr sz="1500"/>
-              <a:t>- Counting only the intended error type: reviews that find a different error still succeed. The scripts report both numbers - quote the any-error one.</a:t>
+              <a:t>- Counting only the intended error type: reviews that find a different error still succeed. The scripts report both numbers; quote the any-error one.</a:t>
             </a:r>
           </a:p>
           <a:p>
@@ -5593,7 +5593,7 @@
             </a:pPr>
             <a:r>
               <a:rPr sz="1500"/>
-              <a:t>- Repo: github.com/giannella/snap_qc - scripts, data pipeline, this deck</a:t>
+              <a:t>- Repo: github.com/giannella/snap_qc: scripts, data pipeline, this deck</a:t>
             </a:r>
           </a:p>
           <a:p>
@@ -5637,7 +5637,7 @@
             </a:pPr>
             <a:r>
               <a:rPr sz="1500"/>
-              <a:t>- Questions / your state's results: please reach out - the pipeline improves when states report back</a:t>
+              <a:t>- Questions / your state's results: please reach out; the pipeline improves when states report back</a:t>
             </a:r>
           </a:p>
         </p:txBody>
@@ -5718,7 +5718,7 @@
             </a:pPr>
             <a:r>
               <a:rPr sz="1500"/>
-              <a:t>- Numbers below are from a year of data the tuning never saw - not the training data:</a:t>
+              <a:t>- Numbers below are from a year of data the tuning never saw, not the training data:</a:t>
             </a:r>
           </a:p>
           <a:p>
@@ -5865,7 +5865,7 @@
             </a:pPr>
             <a:r>
               <a:rPr sz="1500"/>
-              <a:t>- Part 1 - what the finder script does, and how to read what it produces (Demo 1: explore real outputs)</a:t>
+              <a:t>- Part 1: what the finder script does, and how to read what it produces (Demo 1: explore real outputs)</a:t>
             </a:r>
           </a:p>
           <a:p>
@@ -5876,7 +5876,7 @@
             </a:pPr>
             <a:r>
               <a:rPr sz="1500"/>
-              <a:t>- Part 2 - tuning rules to one state and testing them honestly (Demo 2: live run for a state you pick)</a:t>
+              <a:t>- Part 2: tuning rules to one state and testing them honestly (Demo 2: live run for a state you pick)</a:t>
             </a:r>
           </a:p>
           <a:p>
@@ -5887,7 +5887,7 @@
             </a:pPr>
             <a:r>
               <a:rPr sz="1500"/>
-              <a:t>- Part 3 - the fresh results from our opening run + how to adapt everything to your own internal data</a:t>
+              <a:t>- Part 3: the fresh results from our opening run + how to adapt everything to your own internal data</a:t>
             </a:r>
           </a:p>
         </p:txBody>
@@ -6012,7 +6012,7 @@
             </a:pPr>
             <a:r>
               <a:rPr sz="1300"/>
-              <a:t>    - for real use: your internal review data works the same way - swap the variable list at the top of the script</a:t>
+              <a:t>    - for real use: your internal review data works the same way; swap the variable list at the top of the script</a:t>
             </a:r>
           </a:p>
           <a:p>
@@ -6023,7 +6023,7 @@
             </a:pPr>
             <a:r>
               <a:rPr sz="1500"/>
-              <a:t>- No special hardware - a normal laptop is fine</a:t>
+              <a:t>- No special hardware: a normal laptop is fine</a:t>
             </a:r>
           </a:p>
         </p:txBody>
@@ -6126,7 +6126,7 @@
             </a:pPr>
             <a:r>
               <a:rPr sz="1500"/>
-              <a:t>- Then the third decision: HOW MANY rules to deploy - pick the precision floor whose flagged-case volume matches your review capacity.</a:t>
+              <a:t>- Then the third decision: HOW MANY rules to deploy: pick the precision floor whose flagged-case volume matches your review capacity.</a:t>
             </a:r>
           </a:p>
         </p:txBody>
@@ -6270,7 +6270,7 @@
             </a:pPr>
             <a:r>
               <a:rPr sz="1400"/>
-              <a:t>- features: any numeric or yes/no columns in your data - this is the main thing you customize</a:t>
+              <a:t>- features: any numeric or yes/no columns in your data: this is the main thing you customize</a:t>
             </a:r>
           </a:p>
           <a:p>
@@ -6292,7 +6292,7 @@
             </a:pPr>
             <a:r>
               <a:rPr sz="1400"/>
-              <a:t>- Everything else has sensible defaults from our testing - you can run it unchanged</a:t>
+              <a:t>- Everything else has sensible defaults from our testing, so you can run it unchanged</a:t>
             </a:r>
           </a:p>
         </p:txBody>
@@ -6444,7 +6444,7 @@
             </a:pPr>
             <a:r>
               <a:rPr sz="1400"/>
-              <a:t>- It repeats this for each error type and household size - a full national run takes a couple of hours; small practice runs take minutes</a:t>
+              <a:t>- It repeats this for each error type and household size; a full national run takes a couple of hours; small practice runs take minutes</a:t>
             </a:r>
           </a:p>
           <a:p>
@@ -6536,7 +6536,7 @@
             </a:pPr>
             <a:r>
               <a:rPr sz="1400"/>
-              <a:t>- ..._rules_all.csv - every surviving rule with its scores: on the build data, on the held-back year, and counting any error type it catches</a:t>
+              <a:t>- ..._rules_all.csv: every surviving rule with its scores: on the build data, on the held-back year, and counting any error type it catches</a:t>
             </a:r>
           </a:p>
           <a:p>
@@ -6547,7 +6547,7 @@
             </a:pPr>
             <a:r>
               <a:rPr sz="1400"/>
-              <a:t>- ..._rules_highprecision.csv - the shortlist: rules we're confident about, near-duplicates removed. This is the file states actually review.</a:t>
+              <a:t>- ..._rules_highprecision.csv: the shortlist: rules we're confident about, near-duplicates removed. This is the file states actually review.</a:t>
             </a:r>
           </a:p>
           <a:p>
@@ -6558,7 +6558,7 @@
             </a:pPr>
             <a:r>
               <a:rPr sz="1400"/>
-              <a:t>- ..._lcb_sweep.csv + .png - the menu: for each precision floor, how many cases all kept rules flag together and what share of errors/dollars they catch</a:t>
+              <a:t>- ..._lcb_sweep.csv + .png: the menu: for each precision floor, how many cases all kept rules flag together and what share of errors/dollars they catch</a:t>
             </a:r>
           </a:p>
           <a:p>
@@ -6569,7 +6569,7 @@
             </a:pPr>
             <a:r>
               <a:rPr sz="1400"/>
-              <a:t>- final_rules_highprecision_all_frames.csv - shortlists from all error types combined (one row per rule; a 'frame' column says where it came from)</a:t>
+              <a:t>- final_rules_highprecision_all_frames.csv: shortlists from all error types combined (one row per rule; a 'frame' column says where it came from)</a:t>
             </a:r>
           </a:p>
         </p:txBody>
